--- a/task_3/initial_output/Polymer Micro Particle Production Block Diagram.pptx.pptx
+++ b/task_3/initial_output/Polymer Micro Particle Production Block Diagram.pptx.pptx
@@ -4732,7 +4732,7 @@
                   <a:srgbClr val="C00000"/>
                 </a:solidFill>
               </a:rPr>
-              <a:t>Sample Point A</a:t>
+              <a:t>Monitoring Port</a:t>
             </a:r>
             <a:endParaRPr lang="en-GB" i="1" dirty="0">
               <a:solidFill>
